--- a/L7-measurement-hpcci.pptx
+++ b/L7-measurement-hpcci.pptx
@@ -126,18 +126,18 @@
   <pc:docChgLst>
     <pc:chgData name="Andrew Turner" userId="9b60647a-c825-4266-aafa-670849c64782" providerId="ADAL" clId="{292526B5-234E-5EAA-AFB8-0412B8CA4453}"/>
     <pc:docChg chg="undo custSel addSld delSld modSld modMainMaster">
-      <pc:chgData name="Andrew Turner" userId="9b60647a-c825-4266-aafa-670849c64782" providerId="ADAL" clId="{292526B5-234E-5EAA-AFB8-0412B8CA4453}" dt="2026-02-03T10:42:35.718" v="2704" actId="20577"/>
+      <pc:chgData name="Andrew Turner" userId="9b60647a-c825-4266-aafa-670849c64782" providerId="ADAL" clId="{292526B5-234E-5EAA-AFB8-0412B8CA4453}" dt="2026-02-25T21:20:49.839" v="2739" actId="20577"/>
       <pc:docMkLst>
         <pc:docMk/>
       </pc:docMkLst>
       <pc:sldChg chg="modSp new mod">
-        <pc:chgData name="Andrew Turner" userId="9b60647a-c825-4266-aafa-670849c64782" providerId="ADAL" clId="{292526B5-234E-5EAA-AFB8-0412B8CA4453}" dt="2026-02-03T10:41:48.384" v="2686" actId="20577"/>
+        <pc:chgData name="Andrew Turner" userId="9b60647a-c825-4266-aafa-670849c64782" providerId="ADAL" clId="{292526B5-234E-5EAA-AFB8-0412B8CA4453}" dt="2026-02-25T21:20:06.108" v="2717" actId="20577"/>
         <pc:sldMkLst>
           <pc:docMk/>
           <pc:sldMk cId="604027087" sldId="262"/>
         </pc:sldMkLst>
         <pc:spChg chg="mod">
-          <ac:chgData name="Andrew Turner" userId="9b60647a-c825-4266-aafa-670849c64782" providerId="ADAL" clId="{292526B5-234E-5EAA-AFB8-0412B8CA4453}" dt="2026-02-03T10:41:48.384" v="2686" actId="20577"/>
+          <ac:chgData name="Andrew Turner" userId="9b60647a-c825-4266-aafa-670849c64782" providerId="ADAL" clId="{292526B5-234E-5EAA-AFB8-0412B8CA4453}" dt="2026-02-25T21:20:06.108" v="2717" actId="20577"/>
           <ac:spMkLst>
             <pc:docMk/>
             <pc:sldMk cId="604027087" sldId="262"/>
@@ -146,13 +146,13 @@
         </pc:spChg>
       </pc:sldChg>
       <pc:sldChg chg="modSp mod">
-        <pc:chgData name="Andrew Turner" userId="9b60647a-c825-4266-aafa-670849c64782" providerId="ADAL" clId="{292526B5-234E-5EAA-AFB8-0412B8CA4453}" dt="2026-02-03T10:42:35.718" v="2704" actId="20577"/>
+        <pc:chgData name="Andrew Turner" userId="9b60647a-c825-4266-aafa-670849c64782" providerId="ADAL" clId="{292526B5-234E-5EAA-AFB8-0412B8CA4453}" dt="2026-02-25T21:20:49.839" v="2739" actId="20577"/>
         <pc:sldMkLst>
           <pc:docMk/>
           <pc:sldMk cId="3904225902" sldId="263"/>
         </pc:sldMkLst>
         <pc:spChg chg="mod">
-          <ac:chgData name="Andrew Turner" userId="9b60647a-c825-4266-aafa-670849c64782" providerId="ADAL" clId="{292526B5-234E-5EAA-AFB8-0412B8CA4453}" dt="2026-02-03T10:42:35.718" v="2704" actId="20577"/>
+          <ac:chgData name="Andrew Turner" userId="9b60647a-c825-4266-aafa-670849c64782" providerId="ADAL" clId="{292526B5-234E-5EAA-AFB8-0412B8CA4453}" dt="2026-02-25T21:20:49.839" v="2739" actId="20577"/>
           <ac:spMkLst>
             <pc:docMk/>
             <pc:sldMk cId="3904225902" sldId="263"/>
@@ -312,7 +312,7 @@
           <a:p>
             <a:fld id="{305D841F-A440-6145-A19B-398627BB24A4}" type="datetimeFigureOut">
               <a:rPr lang="en-GB" smtClean="0"/>
-              <a:t>03/02/2026</a:t>
+              <a:t>25/02/2026</a:t>
             </a:fld>
             <a:endParaRPr lang="en-GB"/>
           </a:p>
@@ -510,7 +510,7 @@
           <a:p>
             <a:fld id="{305D841F-A440-6145-A19B-398627BB24A4}" type="datetimeFigureOut">
               <a:rPr lang="en-GB" smtClean="0"/>
-              <a:t>03/02/2026</a:t>
+              <a:t>25/02/2026</a:t>
             </a:fld>
             <a:endParaRPr lang="en-GB"/>
           </a:p>
@@ -718,7 +718,7 @@
           <a:p>
             <a:fld id="{305D841F-A440-6145-A19B-398627BB24A4}" type="datetimeFigureOut">
               <a:rPr lang="en-GB" smtClean="0"/>
-              <a:t>03/02/2026</a:t>
+              <a:t>25/02/2026</a:t>
             </a:fld>
             <a:endParaRPr lang="en-GB"/>
           </a:p>
@@ -916,7 +916,7 @@
           <a:p>
             <a:fld id="{305D841F-A440-6145-A19B-398627BB24A4}" type="datetimeFigureOut">
               <a:rPr lang="en-GB" smtClean="0"/>
-              <a:t>03/02/2026</a:t>
+              <a:t>25/02/2026</a:t>
             </a:fld>
             <a:endParaRPr lang="en-GB"/>
           </a:p>
@@ -1191,7 +1191,7 @@
           <a:p>
             <a:fld id="{305D841F-A440-6145-A19B-398627BB24A4}" type="datetimeFigureOut">
               <a:rPr lang="en-GB" smtClean="0"/>
-              <a:t>03/02/2026</a:t>
+              <a:t>25/02/2026</a:t>
             </a:fld>
             <a:endParaRPr lang="en-GB"/>
           </a:p>
@@ -1456,7 +1456,7 @@
           <a:p>
             <a:fld id="{305D841F-A440-6145-A19B-398627BB24A4}" type="datetimeFigureOut">
               <a:rPr lang="en-GB" smtClean="0"/>
-              <a:t>03/02/2026</a:t>
+              <a:t>25/02/2026</a:t>
             </a:fld>
             <a:endParaRPr lang="en-GB"/>
           </a:p>
@@ -1868,7 +1868,7 @@
           <a:p>
             <a:fld id="{305D841F-A440-6145-A19B-398627BB24A4}" type="datetimeFigureOut">
               <a:rPr lang="en-GB" smtClean="0"/>
-              <a:t>03/02/2026</a:t>
+              <a:t>25/02/2026</a:t>
             </a:fld>
             <a:endParaRPr lang="en-GB"/>
           </a:p>
@@ -2009,7 +2009,7 @@
           <a:p>
             <a:fld id="{305D841F-A440-6145-A19B-398627BB24A4}" type="datetimeFigureOut">
               <a:rPr lang="en-GB" smtClean="0"/>
-              <a:t>03/02/2026</a:t>
+              <a:t>25/02/2026</a:t>
             </a:fld>
             <a:endParaRPr lang="en-GB"/>
           </a:p>
@@ -2122,7 +2122,7 @@
           <a:p>
             <a:fld id="{305D841F-A440-6145-A19B-398627BB24A4}" type="datetimeFigureOut">
               <a:rPr lang="en-GB" smtClean="0"/>
-              <a:t>03/02/2026</a:t>
+              <a:t>25/02/2026</a:t>
             </a:fld>
             <a:endParaRPr lang="en-GB"/>
           </a:p>
@@ -2433,7 +2433,7 @@
           <a:p>
             <a:fld id="{305D841F-A440-6145-A19B-398627BB24A4}" type="datetimeFigureOut">
               <a:rPr lang="en-GB" smtClean="0"/>
-              <a:t>03/02/2026</a:t>
+              <a:t>25/02/2026</a:t>
             </a:fld>
             <a:endParaRPr lang="en-GB"/>
           </a:p>
@@ -2721,7 +2721,7 @@
           <a:p>
             <a:fld id="{305D841F-A440-6145-A19B-398627BB24A4}" type="datetimeFigureOut">
               <a:rPr lang="en-GB" smtClean="0"/>
-              <a:t>03/02/2026</a:t>
+              <a:t>25/02/2026</a:t>
             </a:fld>
             <a:endParaRPr lang="en-GB"/>
           </a:p>
@@ -2965,7 +2965,7 @@
           <a:p>
             <a:fld id="{305D841F-A440-6145-A19B-398627BB24A4}" type="datetimeFigureOut">
               <a:rPr lang="en-GB" smtClean="0"/>
-              <a:t>03/02/2026</a:t>
+              <a:t>25/02/2026</a:t>
             </a:fld>
             <a:endParaRPr lang="en-GB"/>
           </a:p>
@@ -4660,7 +4660,7 @@
             </a:pPr>
             <a:r>
               <a:rPr lang="en-GB" dirty="0"/>
-              <a:t>In the previous exercise we computed the total HPC system emissions for 3 months of project use to be 141,695 kgCO</a:t>
+              <a:t>In the previous exercise we computed the total HPC system emissions for 3 months of project use to be 14,021 kgCO</a:t>
             </a:r>
             <a:r>
               <a:rPr lang="en-GB" baseline="-25000" dirty="0"/>
@@ -4831,7 +4831,7 @@
             </a:br>
             <a:r>
               <a:rPr lang="en-GB" sz="2400" dirty="0"/>
-              <a:t>141,695 kgCO</a:t>
+              <a:t>14,020 kgCO</a:t>
             </a:r>
             <a:r>
               <a:rPr lang="en-GB" sz="2400" baseline="-25000" dirty="0"/>
@@ -4839,7 +4839,7 @@
             </a:r>
             <a:r>
               <a:rPr lang="en-GB" sz="2400" dirty="0"/>
-              <a:t>e / 3,680 simulated years = 38.5 kgCO</a:t>
+              <a:t>e / 3,680 simulated years = 3.8 kgCO</a:t>
             </a:r>
             <a:r>
               <a:rPr lang="en-GB" sz="2400" baseline="-25000" dirty="0"/>
@@ -4871,7 +4871,7 @@
             </a:br>
             <a:r>
               <a:rPr lang="en-GB" sz="2400" dirty="0"/>
-              <a:t>141,695 kgCO</a:t>
+              <a:t>14,020 kgCO</a:t>
             </a:r>
             <a:r>
               <a:rPr lang="en-GB" sz="2400" baseline="-25000" dirty="0"/>
@@ -4891,7 +4891,7 @@
             </a:r>
             <a:r>
               <a:rPr lang="en-GB" sz="2400"/>
-              <a:t>= 128.8 </a:t>
+              <a:t>= 12.8 </a:t>
             </a:r>
             <a:r>
               <a:rPr lang="en-GB" sz="2400" dirty="0"/>
